--- a/assets/pptx/catalog-545.pptx
+++ b/assets/pptx/catalog-545.pptx
@@ -3390,7 +3390,7 @@
                 <a:ea typeface="Ebrima"/>
                 <a:cs typeface="Ebrima"/>
               </a:rPr>
-              <a:t>አንተ በህይወቴ አለህ ትልቅ ስፍራ (2x)</a:t>
+              <a:t>አንተ በህይወቴ አለህ ትልቅ ስፍራ 2x</a:t>
             </a:r>
           </a:p>
           <a:p>
@@ -3426,7 +3426,7 @@
                 <a:ea typeface="Ebrima"/>
                 <a:cs typeface="Ebrima"/>
               </a:rPr>
-              <a:t>አንተ በህይወቴ አለህ ትልቅ ስፍራ (2x)</a:t>
+              <a:t>አንተ በህይወቴ አለህ ትልቅ ስፍራ 2x</a:t>
             </a:r>
           </a:p>
           <a:p>
@@ -3462,7 +3462,7 @@
                 <a:ea typeface="Ebrima"/>
                 <a:cs typeface="Ebrima"/>
               </a:rPr>
-              <a:t>አንተ በህይወቴ አለህ ትልቅ ስፍራ (2x)</a:t>
+              <a:t>አንተ በህይወቴ አለህ ትልቅ ስፍራ 2x</a:t>
             </a:r>
           </a:p>
           <a:p>
@@ -3498,7 +3498,7 @@
                 <a:ea typeface="Ebrima"/>
                 <a:cs typeface="Ebrima"/>
               </a:rPr>
-              <a:t>አንተ በህይወቴ አለህ ትልቅ ስፍራ (2x)</a:t>
+              <a:t>አንተ በህይወቴ አለህ ትልቅ ስፍራ 2x</a:t>
             </a:r>
           </a:p>
         </p:txBody>
@@ -3704,7 +3704,7 @@
                 <a:ea typeface="Ebrima"/>
                 <a:cs typeface="Ebrima"/>
               </a:rPr>
-              <a:t>ነገሬን ጉዳዬን ጌታ ሆይ (2x)</a:t>
+              <a:t>ነገሬን ጉዳዬን ጌታ ሆይ 2x</a:t>
             </a:r>
           </a:p>
         </p:txBody>
@@ -3789,7 +3789,7 @@
                 <a:ea typeface="Ebrima"/>
                 <a:cs typeface="Ebrima"/>
               </a:rPr>
-              <a:t>ይዜው ነገሬን ጉዳዬን (2x)</a:t>
+              <a:t>ይዜው ነገሬን ጉዳዬን 2x</a:t>
             </a:r>
           </a:p>
         </p:txBody>
